--- a/docs/부록E-학생용-시스템-해부도-슬라이드.pptx
+++ b/docs/부록E-학생용-시스템-해부도-슬라이드.pptx
@@ -13870,7 +13870,7 @@
                 <a:ea typeface="Consolas" pitchFamily="34" charset="-122"/>
                 <a:cs typeface="Consolas" pitchFamily="34" charset="-120"/>
               </a:rPr>
-              <a:t>X-Device-Api-Key: wake_up_2026...</a:t>
+              <a:t>X-Device-Api-Key: 우리팀_비밀키...</a:t>
             </a:r>
             <a:endParaRPr lang="en-US" sz="1200" dirty="0"/>
           </a:p>
